--- a/assets/pptx/catalog-45.pptx
+++ b/assets/pptx/catalog-45.pptx
@@ -3272,7 +3272,7 @@
                 <a:ea typeface="Ebrima"/>
                 <a:cs typeface="Ebrima"/>
               </a:rPr>
-              <a:t>የደስታዬ ምንጭ አንተ ነህ (2x) ነገር ቢሞላ ነገር ባይሞላ የደስታዬ ምንጭ አንተ ነህ የሰላሜ ምንጭ አንተ ነህ (2x) ነገር ቢሞላ ነገር ባይሞላ የሰላሜ ምንጭ አንተ ነህ</a:t>
+              <a:t>የደስታዬ ምንጭ አንተ ነህ 2x ነገር ቢሞላ ነገር ባይሞላ የደስታዬ ምንጭ አንተ ነህ የሰላሜ ምንጭ አንተ ነህ 2x ነገር ቢሞላ ነገር ባይሞላ የሰላሜ ምንጭ አንተ ነህ</a:t>
             </a:r>
           </a:p>
         </p:txBody>
@@ -3540,7 +3540,7 @@
                 <a:ea typeface="Ebrima"/>
                 <a:cs typeface="Ebrima"/>
               </a:rPr>
-              <a:t>(2x)</a:t>
+              <a:t>2x</a:t>
             </a:r>
           </a:p>
         </p:txBody>
@@ -3674,7 +3674,7 @@
                 <a:ea typeface="Ebrima"/>
                 <a:cs typeface="Ebrima"/>
               </a:rPr>
-              <a:t>(2x)</a:t>
+              <a:t>2x</a:t>
             </a:r>
           </a:p>
         </p:txBody>
@@ -3808,7 +3808,7 @@
                 <a:ea typeface="Ebrima"/>
                 <a:cs typeface="Ebrima"/>
               </a:rPr>
-              <a:t>(3x), ይፍለቀለቃል ከውስጤ, አይቋረጥም ሰላሜ, (3x), ይፍለቀለቃል ከውስጤ</a:t>
+              <a:t>3x, ይፍለቀለቃል ከውስጤ, አይቋረጥም ሰላሜ, 3x, ይፍለቀለቃል ከውስጤ</a:t>
             </a:r>
           </a:p>
         </p:txBody>
@@ -3875,7 +3875,7 @@
                 <a:ea typeface="Ebrima"/>
                 <a:cs typeface="Ebrima"/>
               </a:rPr>
-              <a:t>የደስታዬ ምንጭ አንተ ነህ (2x) ነገር ቢሞላ ነገር ባይሞላ የደስታዬ ምንጭ አንተ ነህ የሰላሜ ምንጭ አንተ ነህ (2x) ነገር ቢሞላ ነገር ባይሞላ የሰላሜ ምንጭ አንተ ነህ</a:t>
+              <a:t>የደስታዬ ምንጭ አንተ ነህ 2x ነገር ቢሞላ ነገር ባይሞላ የደስታዬ ምንጭ አንተ ነህ የሰላሜ ምንጭ አንተ ነህ 2x ነገር ቢሞላ ነገር ባይሞላ የሰላሜ ምንጭ አንተ ነህ</a:t>
             </a:r>
           </a:p>
         </p:txBody>
@@ -3942,7 +3942,7 @@
                 <a:ea typeface="Ebrima"/>
                 <a:cs typeface="Ebrima"/>
               </a:rPr>
-              <a:t>የደስታዬ ምንጭ አንተ ነህ (2x) ነገር ቢሞላ ነገር ባይሞላ የደስታዬ ምንጭ አንተ ነህ የሰላሜ ምንጭ አንተ ነህ (2x) ነገር ቢሞላ ነገር ባይሞላ የሰላሜ ምንጭ አንተ ነህ</a:t>
+              <a:t>የደስታዬ ምንጭ አንተ ነህ 2x ነገር ቢሞላ ነገር ባይሞላ የደስታዬ ምንጭ አንተ ነህ የሰላሜ ምንጭ አንተ ነህ 2x ነገር ቢሞላ ነገር ባይሞላ የሰላሜ ምንጭ አንተ ነህ</a:t>
             </a:r>
           </a:p>
         </p:txBody>
@@ -4478,7 +4478,7 @@
                 <a:ea typeface="Ebrima"/>
                 <a:cs typeface="Ebrima"/>
               </a:rPr>
-              <a:t>(3x)</a:t>
+              <a:t>3x</a:t>
             </a:r>
           </a:p>
         </p:txBody>
@@ -4746,7 +4746,7 @@
                 <a:ea typeface="Ebrima"/>
                 <a:cs typeface="Ebrima"/>
               </a:rPr>
-              <a:t>(3x)</a:t>
+              <a:t>3x</a:t>
             </a:r>
           </a:p>
         </p:txBody>
@@ -5215,7 +5215,7 @@
                 <a:ea typeface="Ebrima"/>
                 <a:cs typeface="Ebrima"/>
               </a:rPr>
-              <a:t>(2x)</a:t>
+              <a:t>2x</a:t>
             </a:r>
           </a:p>
         </p:txBody>
